--- a/presentations/PR_L09_AssemblyLine_Lesson.pptx
+++ b/presentations/PR_L09_AssemblyLine_Lesson.pptx
@@ -2617,7 +2617,7 @@
                 <a:ea typeface="IBM Plex Sans" pitchFamily="34" charset="-122"/>
                 <a:cs typeface="IBM Plex Sans" pitchFamily="34" charset="-120"/>
               </a:rPr>
-              <a:t>Mistake: repeating the same lines instead of writing one subprogram and calling it.</a:t>
+              <a:t>Common mistake: repeating the same lines instead of writing one subprogram and calling it.</a:t>
             </a:r>
             <a:endParaRPr lang="en-US" sz="1700" dirty="0"/>
           </a:p>
@@ -7839,7 +7839,7 @@
                 <a:ea typeface="IBM Plex Sans" pitchFamily="34" charset="-122"/>
                 <a:cs typeface="IBM Plex Sans" pitchFamily="34" charset="-120"/>
               </a:rPr>
-              <a:t>Mistake: defining a procedure and never calling it, so none of it ever runs.</a:t>
+              <a:t>Common mistake: defining a procedure and never calling it, so none of it ever runs.</a:t>
             </a:r>
             <a:endParaRPr lang="en-US" sz="1700" dirty="0"/>
           </a:p>
@@ -8415,7 +8415,7 @@
                 <a:ea typeface="IBM Plex Sans" pitchFamily="34" charset="-122"/>
                 <a:cs typeface="IBM Plex Sans" pitchFamily="34" charset="-120"/>
               </a:rPr>
-              <a:t>Mistake: giving the arguments in a different order from the parameters.</a:t>
+              <a:t>Common mistake: giving the arguments in a different order from the parameters.</a:t>
             </a:r>
             <a:endParaRPr lang="en-US" sz="1700" dirty="0"/>
           </a:p>
@@ -8991,7 +8991,7 @@
                 <a:ea typeface="IBM Plex Sans" pitchFamily="34" charset="-122"/>
                 <a:cs typeface="IBM Plex Sans" pitchFamily="34" charset="-120"/>
               </a:rPr>
-              <a:t>Mistake: printing inside when the task says return, so nothing is handed back.</a:t>
+              <a:t>Common mistake: printing inside when the task says return, so nothing is handed back.</a:t>
             </a:r>
             <a:endParaRPr lang="en-US" sz="1700" dirty="0"/>
           </a:p>
@@ -9567,7 +9567,7 @@
                 <a:ea typeface="IBM Plex Sans" pitchFamily="34" charset="-122"/>
                 <a:cs typeface="IBM Plex Sans" pitchFamily="34" charset="-120"/>
               </a:rPr>
-              <a:t>Mistake: calling something a function when all it does is print.</a:t>
+              <a:t>Common mistake: calling something a function when all it does is print.</a:t>
             </a:r>
             <a:endParaRPr lang="en-US" sz="1700" dirty="0"/>
           </a:p>
@@ -10143,7 +10143,7 @@
                 <a:ea typeface="IBM Plex Sans" pitchFamily="34" charset="-122"/>
                 <a:cs typeface="IBM Plex Sans" pitchFamily="34" charset="-120"/>
               </a:rPr>
-              <a:t>Mistake: expecting a local variable's value to survive after the subprogram ends.</a:t>
+              <a:t>Common mistake: expecting a local variable's value to survive after the subprogram ends.</a:t>
             </a:r>
             <a:endParaRPr lang="en-US" sz="1700" dirty="0"/>
           </a:p>
